--- a/第3章-星载雷达测高应用-12学时/第3节-星载雷达测高作业-2学时.pptx
+++ b/第3章-星载雷达测高应用-12学时/第3节-星载雷达测高作业-2学时.pptx
@@ -6,19 +6,20 @@
     <p:sldMasterId id="2147484986" r:id="rId2"/>
   </p:sldMasterIdLst>
   <p:notesMasterIdLst>
-    <p:notesMasterId r:id="rId5"/>
+    <p:notesMasterId r:id="rId6"/>
   </p:notesMasterIdLst>
   <p:handoutMasterIdLst>
-    <p:handoutMasterId r:id="rId6"/>
+    <p:handoutMasterId r:id="rId7"/>
   </p:handoutMasterIdLst>
   <p:sldIdLst>
     <p:sldId id="2734" r:id="rId3"/>
     <p:sldId id="2727" r:id="rId4"/>
+    <p:sldId id="2735" r:id="rId5"/>
   </p:sldIdLst>
   <p:sldSz cx="9144000" cy="6858000" type="screen4x3"/>
   <p:notesSz cx="7099300" cy="10234613"/>
   <p:custDataLst>
-    <p:tags r:id="rId7"/>
+    <p:tags r:id="rId8"/>
   </p:custDataLst>
   <p:defaultTextStyle>
     <a:defPPr>
@@ -509,6 +510,30 @@
     </pc:docChg>
   </pc:docChgLst>
   <pc:docChgLst>
+    <pc:chgData name="Xin Luo" userId="82312ee5779919a4" providerId="LiveId" clId="{37D42620-D994-0749-AEB6-71C6987E1DE6}"/>
+    <pc:docChg chg="modSld">
+      <pc:chgData name="Xin Luo" userId="82312ee5779919a4" providerId="LiveId" clId="{37D42620-D994-0749-AEB6-71C6987E1DE6}" dt="2023-11-17T01:36:24.938" v="42" actId="20577"/>
+      <pc:docMkLst>
+        <pc:docMk/>
+      </pc:docMkLst>
+      <pc:sldChg chg="modSp mod">
+        <pc:chgData name="Xin Luo" userId="82312ee5779919a4" providerId="LiveId" clId="{37D42620-D994-0749-AEB6-71C6987E1DE6}" dt="2023-11-17T01:36:24.938" v="42" actId="20577"/>
+        <pc:sldMkLst>
+          <pc:docMk/>
+          <pc:sldMk cId="2241021106" sldId="2734"/>
+        </pc:sldMkLst>
+        <pc:spChg chg="mod">
+          <ac:chgData name="Xin Luo" userId="82312ee5779919a4" providerId="LiveId" clId="{37D42620-D994-0749-AEB6-71C6987E1DE6}" dt="2023-11-17T01:36:24.938" v="42" actId="20577"/>
+          <ac:spMkLst>
+            <pc:docMk/>
+            <pc:sldMk cId="2241021106" sldId="2734"/>
+            <ac:spMk id="24" creationId="{00000000-0000-0000-0000-000000000000}"/>
+          </ac:spMkLst>
+        </pc:spChg>
+      </pc:sldChg>
+    </pc:docChg>
+  </pc:docChgLst>
+  <pc:docChgLst>
     <pc:chgData name="Xin Luo" userId="82312ee5779919a4" providerId="LiveId" clId="{F9D543B9-EE8F-F947-98CD-0A5B9B077609}"/>
     <pc:docChg chg="undo custSel modSld">
       <pc:chgData name="Xin Luo" userId="82312ee5779919a4" providerId="LiveId" clId="{F9D543B9-EE8F-F947-98CD-0A5B9B077609}" dt="2023-05-28T07:33:19.199" v="786" actId="1035"/>
@@ -627,30 +652,6 @@
             <pc:docMk/>
             <pc:sldMk cId="3309691984" sldId="2731"/>
             <ac:spMk id="9" creationId="{100AD77A-3706-464A-3EA9-8E8FB10A183C}"/>
-          </ac:spMkLst>
-        </pc:spChg>
-      </pc:sldChg>
-    </pc:docChg>
-  </pc:docChgLst>
-  <pc:docChgLst>
-    <pc:chgData name="Xin Luo" userId="82312ee5779919a4" providerId="LiveId" clId="{37D42620-D994-0749-AEB6-71C6987E1DE6}"/>
-    <pc:docChg chg="modSld">
-      <pc:chgData name="Xin Luo" userId="82312ee5779919a4" providerId="LiveId" clId="{37D42620-D994-0749-AEB6-71C6987E1DE6}" dt="2023-11-17T01:36:24.938" v="42" actId="20577"/>
-      <pc:docMkLst>
-        <pc:docMk/>
-      </pc:docMkLst>
-      <pc:sldChg chg="modSp mod">
-        <pc:chgData name="Xin Luo" userId="82312ee5779919a4" providerId="LiveId" clId="{37D42620-D994-0749-AEB6-71C6987E1DE6}" dt="2023-11-17T01:36:24.938" v="42" actId="20577"/>
-        <pc:sldMkLst>
-          <pc:docMk/>
-          <pc:sldMk cId="2241021106" sldId="2734"/>
-        </pc:sldMkLst>
-        <pc:spChg chg="mod">
-          <ac:chgData name="Xin Luo" userId="82312ee5779919a4" providerId="LiveId" clId="{37D42620-D994-0749-AEB6-71C6987E1DE6}" dt="2023-11-17T01:36:24.938" v="42" actId="20577"/>
-          <ac:spMkLst>
-            <pc:docMk/>
-            <pc:sldMk cId="2241021106" sldId="2734"/>
-            <ac:spMk id="24" creationId="{00000000-0000-0000-0000-000000000000}"/>
           </ac:spMkLst>
         </pc:spChg>
       </pc:sldChg>
@@ -3880,7 +3881,7 @@
               </a14:hiddenFill>
             </a:ext>
             <a:ext uri="{FAA26D3D-D897-4be2-8F04-BA451C77F1D7}">
-              <ma14:placeholderFlag xmlns="" xmlns:ma14="http://schemas.microsoft.com/office/mac/drawingml/2011/main" val="1"/>
+              <ma14:placeholderFlag xmlns:ma14="http://schemas.microsoft.com/office/mac/drawingml/2011/main" xmlns="" val="1"/>
             </a:ext>
           </a:extLst>
         </p:spPr>
@@ -4264,7 +4265,7 @@
               </a14:hiddenLine>
             </a:ext>
             <a:ext uri="{FAA26D3D-D897-4be2-8F04-BA451C77F1D7}">
-              <ma14:placeholderFlag xmlns:ma14="http://schemas.microsoft.com/office/mac/drawingml/2011/main" xmlns="" val="1"/>
+              <ma14:placeholderFlag xmlns="" xmlns:ma14="http://schemas.microsoft.com/office/mac/drawingml/2011/main" val="1"/>
             </a:ext>
           </a:extLst>
         </p:spPr>
@@ -4366,6 +4367,67 @@
     <p:extLst>
       <p:ext uri="{BB962C8B-B14F-4D97-AF65-F5344CB8AC3E}">
         <p14:creationId xmlns:p14="http://schemas.microsoft.com/office/powerpoint/2010/main" val="1437439656"/>
+      </p:ext>
+    </p:extLst>
+  </p:cSld>
+  <p:clrMapOvr>
+    <a:masterClrMapping/>
+  </p:clrMapOvr>
+</p:notes>
+</file>
+
+<file path=ppt/notesSlides/notesSlide3.xml><?xml version="1.0" encoding="utf-8"?>
+<p:notes xmlns:a="http://schemas.openxmlformats.org/drawingml/2006/main" xmlns:r="http://schemas.openxmlformats.org/officeDocument/2006/relationships" xmlns:p="http://schemas.openxmlformats.org/presentationml/2006/main">
+  <p:cSld>
+    <p:spTree>
+      <p:nvGrpSpPr>
+        <p:cNvPr id="1" name=""/>
+        <p:cNvGrpSpPr/>
+        <p:nvPr/>
+      </p:nvGrpSpPr>
+      <p:grpSpPr>
+        <a:xfrm>
+          <a:off x="0" y="0"/>
+          <a:ext cx="0" cy="0"/>
+          <a:chOff x="0" y="0"/>
+          <a:chExt cx="0" cy="0"/>
+        </a:xfrm>
+      </p:grpSpPr>
+      <p:sp>
+        <p:nvSpPr>
+          <p:cNvPr id="2" name="幻灯片图像占位符 1"/>
+          <p:cNvSpPr>
+            <a:spLocks noGrp="1" noRot="1" noChangeAspect="1"/>
+          </p:cNvSpPr>
+          <p:nvPr>
+            <p:ph type="sldImg"/>
+          </p:nvPr>
+        </p:nvSpPr>
+        <p:spPr/>
+      </p:sp>
+      <p:sp>
+        <p:nvSpPr>
+          <p:cNvPr id="3" name="备注占位符 2"/>
+          <p:cNvSpPr>
+            <a:spLocks noGrp="1"/>
+          </p:cNvSpPr>
+          <p:nvPr>
+            <p:ph type="body" idx="1"/>
+          </p:nvPr>
+        </p:nvSpPr>
+        <p:spPr/>
+        <p:txBody>
+          <a:bodyPr/>
+          <a:lstStyle/>
+          <a:p>
+            <a:endParaRPr lang="zh-CN" altLang="en-US" dirty="0"/>
+          </a:p>
+        </p:txBody>
+      </p:sp>
+    </p:spTree>
+    <p:extLst>
+      <p:ext uri="{BB962C8B-B14F-4D97-AF65-F5344CB8AC3E}">
+        <p14:creationId xmlns:p14="http://schemas.microsoft.com/office/powerpoint/2010/main" val="3642080480"/>
       </p:ext>
     </p:extLst>
   </p:cSld>
@@ -6189,7 +6251,7 @@
               </a14:hiddenLine>
             </a:ext>
             <a:ext uri="{FAA26D3D-D897-4be2-8F04-BA451C77F1D7}">
-              <ma14:placeholderFlag xmlns="" xmlns:ma14="http://schemas.microsoft.com/office/mac/drawingml/2011/main" val="1"/>
+              <ma14:placeholderFlag xmlns:ma14="http://schemas.microsoft.com/office/mac/drawingml/2011/main" xmlns="" val="1"/>
             </a:ext>
           </a:extLst>
         </p:spPr>
@@ -9880,7 +9942,7 @@
               </a14:hiddenLine>
             </a:ext>
             <a:ext uri="{FAA26D3D-D897-4be2-8F04-BA451C77F1D7}">
-              <ma14:placeholderFlag xmlns="" xmlns:ma14="http://schemas.microsoft.com/office/mac/drawingml/2011/main" val="1"/>
+              <ma14:placeholderFlag xmlns:ma14="http://schemas.microsoft.com/office/mac/drawingml/2011/main" xmlns="" val="1"/>
             </a:ext>
           </a:extLst>
         </p:spPr>
@@ -12155,7 +12217,7 @@
         <p:spPr>
           <a:xfrm>
             <a:off x="653230" y="1745741"/>
-            <a:ext cx="7706910" cy="3243324"/>
+            <a:ext cx="7706910" cy="4874540"/>
           </a:xfrm>
           <a:prstGeom prst="rect">
             <a:avLst/>
@@ -12177,6 +12239,16 @@
               </a:spcBef>
             </a:pPr>
             <a:r>
+              <a:rPr lang="en-US" altLang="zh-CN" kern="0" dirty="0">
+                <a:solidFill>
+                  <a:srgbClr val="000000"/>
+                </a:solidFill>
+                <a:latin typeface="+mn-ea"/>
+                <a:ea typeface="+mn-ea"/>
+              </a:rPr>
+              <a:t>1. </a:t>
+            </a:r>
+            <a:r>
               <a:rPr lang="zh-CN" altLang="en-US" kern="0" dirty="0">
                 <a:solidFill>
                   <a:srgbClr val="000000"/>
@@ -12184,7 +12256,44 @@
                 <a:latin typeface="+mn-ea"/>
                 <a:ea typeface="+mn-ea"/>
               </a:rPr>
-              <a:t>内容：</a:t>
+              <a:t>以小组为单位完成作业。</a:t>
+            </a:r>
+            <a:endParaRPr lang="en-US" altLang="zh-CN" kern="0" dirty="0">
+              <a:solidFill>
+                <a:srgbClr val="000000"/>
+              </a:solidFill>
+              <a:latin typeface="+mn-ea"/>
+              <a:ea typeface="+mn-ea"/>
+            </a:endParaRPr>
+          </a:p>
+          <a:p>
+            <a:pPr indent="266700" algn="just">
+              <a:lnSpc>
+                <a:spcPct val="200000"/>
+              </a:lnSpc>
+              <a:spcBef>
+                <a:spcPts val="1200"/>
+              </a:spcBef>
+            </a:pPr>
+            <a:r>
+              <a:rPr lang="en-US" altLang="zh-CN" kern="0" dirty="0">
+                <a:solidFill>
+                  <a:srgbClr val="000000"/>
+                </a:solidFill>
+                <a:latin typeface="+mn-ea"/>
+                <a:ea typeface="+mn-ea"/>
+              </a:rPr>
+              <a:t>2.</a:t>
+            </a:r>
+            <a:r>
+              <a:rPr lang="zh-CN" altLang="en-US" kern="0" dirty="0">
+                <a:solidFill>
+                  <a:srgbClr val="000000"/>
+                </a:solidFill>
+                <a:latin typeface="+mn-ea"/>
+                <a:ea typeface="+mn-ea"/>
+              </a:rPr>
+              <a:t> </a:t>
             </a:r>
             <a:r>
               <a:rPr lang="zh-CN" altLang="en-CN" kern="0" dirty="0">
@@ -12254,27 +12363,7 @@
                 <a:latin typeface="+mn-ea"/>
                 <a:ea typeface="+mn-ea"/>
               </a:rPr>
-              <a:t>测高数据分析湖泊年度</a:t>
-            </a:r>
-            <a:r>
-              <a:rPr lang="zh-CN" altLang="en-US" kern="0">
-                <a:solidFill>
-                  <a:srgbClr val="000000"/>
-                </a:solidFill>
-                <a:latin typeface="+mn-ea"/>
-                <a:ea typeface="+mn-ea"/>
-              </a:rPr>
-              <a:t>及季节性水位</a:t>
-            </a:r>
-            <a:r>
-              <a:rPr lang="zh-CN" altLang="en-US" kern="0" dirty="0">
-                <a:solidFill>
-                  <a:srgbClr val="000000"/>
-                </a:solidFill>
-                <a:latin typeface="+mn-ea"/>
-                <a:ea typeface="+mn-ea"/>
-              </a:rPr>
-              <a:t>变化。</a:t>
+              <a:t>测高数据分析湖泊年度或季节性水位变化。</a:t>
             </a:r>
             <a:endParaRPr lang="en-US" altLang="zh-CN" kern="0" dirty="0">
               <a:solidFill>
@@ -12294,6 +12383,16 @@
               </a:spcBef>
             </a:pPr>
             <a:r>
+              <a:rPr lang="en-US" altLang="zh-CN" kern="0" dirty="0">
+                <a:solidFill>
+                  <a:srgbClr val="000000"/>
+                </a:solidFill>
+                <a:latin typeface="+mn-ea"/>
+                <a:ea typeface="+mn-ea"/>
+              </a:rPr>
+              <a:t>3.</a:t>
+            </a:r>
+            <a:r>
               <a:rPr lang="zh-CN" altLang="en-US" kern="0" dirty="0">
                 <a:solidFill>
                   <a:srgbClr val="000000"/>
@@ -12301,7 +12400,27 @@
                 <a:latin typeface="+mn-ea"/>
                 <a:ea typeface="+mn-ea"/>
               </a:rPr>
-              <a:t>提交：实验报告一份。</a:t>
+              <a:t> 参考学术论文格式提交实验报告一份，并进行作业的</a:t>
+            </a:r>
+            <a:r>
+              <a:rPr lang="en-US" altLang="zh-CN" kern="0" dirty="0">
+                <a:solidFill>
+                  <a:srgbClr val="000000"/>
+                </a:solidFill>
+                <a:latin typeface="+mn-ea"/>
+                <a:ea typeface="+mn-ea"/>
+              </a:rPr>
+              <a:t>ppt</a:t>
+            </a:r>
+            <a:r>
+              <a:rPr lang="zh-CN" altLang="en-US" kern="0" dirty="0">
+                <a:solidFill>
+                  <a:srgbClr val="000000"/>
+                </a:solidFill>
+                <a:latin typeface="+mn-ea"/>
+                <a:ea typeface="+mn-ea"/>
+              </a:rPr>
+              <a:t>汇报。</a:t>
             </a:r>
             <a:endParaRPr lang="en-US" altLang="zh-CN" kern="0" dirty="0">
               <a:solidFill>
@@ -12397,6 +12516,804 @@
     <p:extLst>
       <p:ext uri="{BB962C8B-B14F-4D97-AF65-F5344CB8AC3E}">
         <p14:creationId xmlns:p14="http://schemas.microsoft.com/office/powerpoint/2010/main" val="623131075"/>
+      </p:ext>
+    </p:extLst>
+  </p:cSld>
+  <p:clrMapOvr>
+    <a:masterClrMapping/>
+  </p:clrMapOvr>
+  <p:transition>
+    <p:fade/>
+  </p:transition>
+</p:sld>
+</file>
+
+<file path=ppt/slides/slide3.xml><?xml version="1.0" encoding="utf-8"?>
+<p:sld xmlns:a="http://schemas.openxmlformats.org/drawingml/2006/main" xmlns:r="http://schemas.openxmlformats.org/officeDocument/2006/relationships" xmlns:p="http://schemas.openxmlformats.org/presentationml/2006/main">
+  <p:cSld>
+    <p:spTree>
+      <p:nvGrpSpPr>
+        <p:cNvPr id="1" name=""/>
+        <p:cNvGrpSpPr/>
+        <p:nvPr/>
+      </p:nvGrpSpPr>
+      <p:grpSpPr>
+        <a:xfrm>
+          <a:off x="0" y="0"/>
+          <a:ext cx="0" cy="0"/>
+          <a:chOff x="0" y="0"/>
+          <a:chExt cx="0" cy="0"/>
+        </a:xfrm>
+      </p:grpSpPr>
+      <p:sp>
+        <p:nvSpPr>
+          <p:cNvPr id="3" name="标题 2"/>
+          <p:cNvSpPr>
+            <a:spLocks noGrp="1"/>
+          </p:cNvSpPr>
+          <p:nvPr>
+            <p:ph type="title"/>
+          </p:nvPr>
+        </p:nvSpPr>
+        <p:spPr>
+          <a:xfrm>
+            <a:off x="0" y="8526"/>
+            <a:ext cx="9013371" cy="792162"/>
+          </a:xfrm>
+        </p:spPr>
+        <p:txBody>
+          <a:bodyPr/>
+          <a:lstStyle/>
+          <a:p>
+            <a:r>
+              <a:rPr lang="zh-CN" altLang="en-US" dirty="0">
+                <a:latin typeface="+mn-ea"/>
+              </a:rPr>
+              <a:t>一、星载雷达测高应用作业</a:t>
+            </a:r>
+            <a:endParaRPr lang="zh-CN" altLang="en-US" dirty="0"/>
+          </a:p>
+        </p:txBody>
+      </p:sp>
+      <p:sp>
+        <p:nvSpPr>
+          <p:cNvPr id="17" name="TextBox 16">
+            <a:extLst>
+              <a:ext uri="{FF2B5EF4-FFF2-40B4-BE49-F238E27FC236}">
+                <a16:creationId xmlns:a16="http://schemas.microsoft.com/office/drawing/2014/main" id="{9E05FFCA-3371-AF5C-381D-71D984055F5A}"/>
+              </a:ext>
+            </a:extLst>
+          </p:cNvPr>
+          <p:cNvSpPr txBox="1"/>
+          <p:nvPr/>
+        </p:nvSpPr>
+        <p:spPr>
+          <a:xfrm>
+            <a:off x="653230" y="1745741"/>
+            <a:ext cx="7706910" cy="2350772"/>
+          </a:xfrm>
+          <a:prstGeom prst="rect">
+            <a:avLst/>
+          </a:prstGeom>
+          <a:noFill/>
+        </p:spPr>
+        <p:txBody>
+          <a:bodyPr wrap="square">
+            <a:spAutoFit/>
+          </a:bodyPr>
+          <a:lstStyle/>
+          <a:p>
+            <a:pPr marL="457200" indent="-457200" algn="just">
+              <a:lnSpc>
+                <a:spcPct val="200000"/>
+              </a:lnSpc>
+              <a:spcBef>
+                <a:spcPts val="1200"/>
+              </a:spcBef>
+              <a:buAutoNum type="arabicPeriod"/>
+            </a:pPr>
+            <a:r>
+              <a:rPr lang="zh-CN" altLang="en-US" kern="0" dirty="0">
+                <a:solidFill>
+                  <a:srgbClr val="000000"/>
+                </a:solidFill>
+                <a:latin typeface="+mn-ea"/>
+                <a:ea typeface="+mn-ea"/>
+              </a:rPr>
+              <a:t>实验报告应包含</a:t>
+            </a:r>
+            <a:r>
+              <a:rPr lang="en-US" altLang="zh-CN" kern="0" dirty="0">
+                <a:solidFill>
+                  <a:srgbClr val="000000"/>
+                </a:solidFill>
+                <a:latin typeface="+mn-ea"/>
+                <a:ea typeface="+mn-ea"/>
+              </a:rPr>
+              <a:t>1</a:t>
+            </a:r>
+            <a:r>
+              <a:rPr lang="zh-CN" altLang="en-US" kern="0" dirty="0">
+                <a:solidFill>
+                  <a:srgbClr val="000000"/>
+                </a:solidFill>
+                <a:latin typeface="+mn-ea"/>
+                <a:ea typeface="+mn-ea"/>
+              </a:rPr>
+              <a:t>）研究区域简介、</a:t>
+            </a:r>
+            <a:r>
+              <a:rPr lang="en-US" altLang="zh-CN" kern="0" dirty="0">
+                <a:solidFill>
+                  <a:srgbClr val="000000"/>
+                </a:solidFill>
+                <a:latin typeface="+mn-ea"/>
+                <a:ea typeface="+mn-ea"/>
+              </a:rPr>
+              <a:t>2</a:t>
+            </a:r>
+            <a:r>
+              <a:rPr lang="zh-CN" altLang="en-US" kern="0" dirty="0">
+                <a:solidFill>
+                  <a:srgbClr val="000000"/>
+                </a:solidFill>
+                <a:latin typeface="+mn-ea"/>
+                <a:ea typeface="+mn-ea"/>
+              </a:rPr>
+              <a:t>）研究方法、</a:t>
+            </a:r>
+            <a:r>
+              <a:rPr lang="en-US" altLang="zh-CN" kern="0" dirty="0">
+                <a:solidFill>
+                  <a:srgbClr val="000000"/>
+                </a:solidFill>
+                <a:latin typeface="+mn-ea"/>
+                <a:ea typeface="+mn-ea"/>
+              </a:rPr>
+              <a:t>3</a:t>
+            </a:r>
+            <a:r>
+              <a:rPr lang="zh-CN" altLang="en-US" kern="0" dirty="0">
+                <a:solidFill>
+                  <a:srgbClr val="000000"/>
+                </a:solidFill>
+                <a:latin typeface="+mn-ea"/>
+                <a:ea typeface="+mn-ea"/>
+              </a:rPr>
+              <a:t>）实验结果、以及</a:t>
+            </a:r>
+            <a:r>
+              <a:rPr lang="en-US" altLang="zh-CN" kern="0" dirty="0">
+                <a:solidFill>
+                  <a:srgbClr val="000000"/>
+                </a:solidFill>
+                <a:latin typeface="+mn-ea"/>
+                <a:ea typeface="+mn-ea"/>
+              </a:rPr>
+              <a:t>4</a:t>
+            </a:r>
+            <a:r>
+              <a:rPr lang="zh-CN" altLang="en-US" kern="0" dirty="0">
+                <a:solidFill>
+                  <a:srgbClr val="000000"/>
+                </a:solidFill>
+                <a:latin typeface="+mn-ea"/>
+                <a:ea typeface="+mn-ea"/>
+              </a:rPr>
+              <a:t>）结果分析。</a:t>
+            </a:r>
+            <a:endParaRPr lang="en-US" altLang="zh-CN" kern="0" dirty="0">
+              <a:solidFill>
+                <a:srgbClr val="000000"/>
+              </a:solidFill>
+              <a:latin typeface="+mn-ea"/>
+              <a:ea typeface="+mn-ea"/>
+            </a:endParaRPr>
+          </a:p>
+          <a:p>
+            <a:pPr marL="457200" indent="-457200" algn="just">
+              <a:lnSpc>
+                <a:spcPct val="200000"/>
+              </a:lnSpc>
+              <a:spcBef>
+                <a:spcPts val="1200"/>
+              </a:spcBef>
+              <a:buAutoNum type="arabicPeriod"/>
+            </a:pPr>
+            <a:r>
+              <a:rPr lang="zh-CN" altLang="en-US" kern="0" dirty="0">
+                <a:solidFill>
+                  <a:srgbClr val="000000"/>
+                </a:solidFill>
+                <a:latin typeface="+mn-ea"/>
+                <a:ea typeface="+mn-ea"/>
+              </a:rPr>
+              <a:t>方法总体思路</a:t>
+            </a:r>
+            <a:endParaRPr lang="en-US" altLang="zh-CN" kern="0" dirty="0">
+              <a:solidFill>
+                <a:srgbClr val="000000"/>
+              </a:solidFill>
+              <a:latin typeface="+mn-ea"/>
+              <a:ea typeface="+mn-ea"/>
+            </a:endParaRPr>
+          </a:p>
+        </p:txBody>
+      </p:sp>
+      <p:sp>
+        <p:nvSpPr>
+          <p:cNvPr id="4" name="TextBox 3">
+            <a:extLst>
+              <a:ext uri="{FF2B5EF4-FFF2-40B4-BE49-F238E27FC236}">
+                <a16:creationId xmlns:a16="http://schemas.microsoft.com/office/drawing/2014/main" id="{DFE91C0B-C9F8-3FEC-3419-2DE0C6E6DCB8}"/>
+              </a:ext>
+            </a:extLst>
+          </p:cNvPr>
+          <p:cNvSpPr txBox="1"/>
+          <p:nvPr/>
+        </p:nvSpPr>
+        <p:spPr>
+          <a:xfrm>
+            <a:off x="317665" y="941970"/>
+            <a:ext cx="8508670" cy="662489"/>
+          </a:xfrm>
+          <a:prstGeom prst="rect">
+            <a:avLst/>
+          </a:prstGeom>
+          <a:noFill/>
+        </p:spPr>
+        <p:txBody>
+          <a:bodyPr wrap="square" rtlCol="0">
+            <a:spAutoFit/>
+          </a:bodyPr>
+          <a:lstStyle/>
+          <a:p>
+            <a:pPr algn="just">
+              <a:lnSpc>
+                <a:spcPct val="150000"/>
+              </a:lnSpc>
+            </a:pPr>
+            <a:r>
+              <a:rPr lang="zh-CN" altLang="en-CN" sz="2800" b="1" dirty="0">
+                <a:solidFill>
+                  <a:srgbClr val="333333"/>
+                </a:solidFill>
+                <a:latin typeface="+mn-ea"/>
+                <a:ea typeface="+mn-ea"/>
+              </a:rPr>
+              <a:t>作业</a:t>
+            </a:r>
+            <a:r>
+              <a:rPr lang="zh-CN" altLang="en-US" sz="2800" b="1" dirty="0">
+                <a:solidFill>
+                  <a:srgbClr val="333333"/>
+                </a:solidFill>
+                <a:latin typeface="+mn-ea"/>
+                <a:ea typeface="+mn-ea"/>
+              </a:rPr>
+              <a:t>备注</a:t>
+            </a:r>
+            <a:endParaRPr lang="en-US" altLang="zh-CN" sz="2800" b="1" dirty="0">
+              <a:solidFill>
+                <a:srgbClr val="333333"/>
+              </a:solidFill>
+              <a:latin typeface="+mn-ea"/>
+              <a:ea typeface="+mn-ea"/>
+            </a:endParaRPr>
+          </a:p>
+        </p:txBody>
+      </p:sp>
+      <p:sp>
+        <p:nvSpPr>
+          <p:cNvPr id="2" name="Rectangle 1">
+            <a:extLst>
+              <a:ext uri="{FF2B5EF4-FFF2-40B4-BE49-F238E27FC236}">
+                <a16:creationId xmlns:a16="http://schemas.microsoft.com/office/drawing/2014/main" id="{96528BA1-8991-86F0-0C70-DF1FEFF90632}"/>
+              </a:ext>
+            </a:extLst>
+          </p:cNvPr>
+          <p:cNvSpPr/>
+          <p:nvPr/>
+        </p:nvSpPr>
+        <p:spPr>
+          <a:xfrm>
+            <a:off x="947600" y="4400550"/>
+            <a:ext cx="2336620" cy="708660"/>
+          </a:xfrm>
+          <a:prstGeom prst="rect">
+            <a:avLst/>
+          </a:prstGeom>
+          <a:solidFill>
+            <a:schemeClr val="tx1"/>
+          </a:solidFill>
+          <a:ln w="28575">
+            <a:solidFill>
+              <a:schemeClr val="bg2"/>
+            </a:solidFill>
+          </a:ln>
+        </p:spPr>
+        <p:txBody>
+          <a:bodyPr wrap="square" lIns="0" rtlCol="0" anchor="ctr">
+            <a:noAutofit/>
+          </a:bodyPr>
+          <a:lstStyle/>
+          <a:p>
+            <a:r>
+              <a:rPr lang="en-CN" sz="1800" b="1" dirty="0">
+                <a:solidFill>
+                  <a:schemeClr val="accent2"/>
+                </a:solidFill>
+                <a:latin typeface="微软雅黑" pitchFamily="34" charset="-122"/>
+                <a:ea typeface="微软雅黑" pitchFamily="34" charset="-122"/>
+              </a:rPr>
+              <a:t>测高数据获取</a:t>
+            </a:r>
+          </a:p>
+        </p:txBody>
+      </p:sp>
+      <p:sp>
+        <p:nvSpPr>
+          <p:cNvPr id="5" name="Rectangle 4">
+            <a:extLst>
+              <a:ext uri="{FF2B5EF4-FFF2-40B4-BE49-F238E27FC236}">
+                <a16:creationId xmlns:a16="http://schemas.microsoft.com/office/drawing/2014/main" id="{C640990A-3859-1204-D72C-5DB97E095954}"/>
+              </a:ext>
+            </a:extLst>
+          </p:cNvPr>
+          <p:cNvSpPr/>
+          <p:nvPr/>
+        </p:nvSpPr>
+        <p:spPr>
+          <a:xfrm>
+            <a:off x="3580310" y="4400550"/>
+            <a:ext cx="2336620" cy="708660"/>
+          </a:xfrm>
+          <a:prstGeom prst="rect">
+            <a:avLst/>
+          </a:prstGeom>
+          <a:solidFill>
+            <a:schemeClr val="tx1"/>
+          </a:solidFill>
+          <a:ln w="28575">
+            <a:solidFill>
+              <a:schemeClr val="bg2"/>
+            </a:solidFill>
+          </a:ln>
+        </p:spPr>
+        <p:txBody>
+          <a:bodyPr wrap="square" lIns="0" rtlCol="0" anchor="ctr">
+            <a:noAutofit/>
+          </a:bodyPr>
+          <a:lstStyle/>
+          <a:p>
+            <a:r>
+              <a:rPr lang="en-CN" sz="1800" b="1" dirty="0">
+                <a:solidFill>
+                  <a:schemeClr val="accent2"/>
+                </a:solidFill>
+                <a:latin typeface="微软雅黑" pitchFamily="34" charset="-122"/>
+                <a:ea typeface="微软雅黑" pitchFamily="34" charset="-122"/>
+              </a:rPr>
+              <a:t>湖泊高程数据读取</a:t>
+            </a:r>
+          </a:p>
+        </p:txBody>
+      </p:sp>
+      <p:sp>
+        <p:nvSpPr>
+          <p:cNvPr id="6" name="Rectangle 5">
+            <a:extLst>
+              <a:ext uri="{FF2B5EF4-FFF2-40B4-BE49-F238E27FC236}">
+                <a16:creationId xmlns:a16="http://schemas.microsoft.com/office/drawing/2014/main" id="{0D468610-405E-EBC2-3815-E9FA6901A5F5}"/>
+              </a:ext>
+            </a:extLst>
+          </p:cNvPr>
+          <p:cNvSpPr/>
+          <p:nvPr/>
+        </p:nvSpPr>
+        <p:spPr>
+          <a:xfrm>
+            <a:off x="6213020" y="4400550"/>
+            <a:ext cx="2336620" cy="708660"/>
+          </a:xfrm>
+          <a:prstGeom prst="rect">
+            <a:avLst/>
+          </a:prstGeom>
+          <a:solidFill>
+            <a:schemeClr val="tx1"/>
+          </a:solidFill>
+          <a:ln w="28575">
+            <a:solidFill>
+              <a:schemeClr val="bg2"/>
+            </a:solidFill>
+          </a:ln>
+        </p:spPr>
+        <p:txBody>
+          <a:bodyPr wrap="square" lIns="0" rtlCol="0" anchor="ctr">
+            <a:noAutofit/>
+          </a:bodyPr>
+          <a:lstStyle/>
+          <a:p>
+            <a:r>
+              <a:rPr lang="en-CN" sz="1800" b="1" dirty="0">
+                <a:solidFill>
+                  <a:schemeClr val="accent2"/>
+                </a:solidFill>
+                <a:latin typeface="微软雅黑" pitchFamily="34" charset="-122"/>
+                <a:ea typeface="微软雅黑" pitchFamily="34" charset="-122"/>
+              </a:rPr>
+              <a:t>湖泊高程数据处理并获得水位信息</a:t>
+            </a:r>
+          </a:p>
+        </p:txBody>
+      </p:sp>
+      <p:sp>
+        <p:nvSpPr>
+          <p:cNvPr id="7" name="Rectangle 6">
+            <a:extLst>
+              <a:ext uri="{FF2B5EF4-FFF2-40B4-BE49-F238E27FC236}">
+                <a16:creationId xmlns:a16="http://schemas.microsoft.com/office/drawing/2014/main" id="{33BE9967-044E-BFBD-276C-9F1BED4463BD}"/>
+              </a:ext>
+            </a:extLst>
+          </p:cNvPr>
+          <p:cNvSpPr/>
+          <p:nvPr/>
+        </p:nvSpPr>
+        <p:spPr>
+          <a:xfrm>
+            <a:off x="947600" y="5741670"/>
+            <a:ext cx="2336620" cy="708660"/>
+          </a:xfrm>
+          <a:prstGeom prst="rect">
+            <a:avLst/>
+          </a:prstGeom>
+          <a:solidFill>
+            <a:schemeClr val="tx1"/>
+          </a:solidFill>
+          <a:ln w="28575">
+            <a:solidFill>
+              <a:schemeClr val="bg2"/>
+            </a:solidFill>
+          </a:ln>
+        </p:spPr>
+        <p:txBody>
+          <a:bodyPr wrap="square" lIns="0" rtlCol="0" anchor="ctr">
+            <a:noAutofit/>
+          </a:bodyPr>
+          <a:lstStyle/>
+          <a:p>
+            <a:r>
+              <a:rPr lang="en-CN" sz="1800" b="1" dirty="0">
+                <a:solidFill>
+                  <a:schemeClr val="accent2"/>
+                </a:solidFill>
+                <a:latin typeface="微软雅黑" pitchFamily="34" charset="-122"/>
+                <a:ea typeface="微软雅黑" pitchFamily="34" charset="-122"/>
+              </a:rPr>
+              <a:t>多时相湖泊水位信息提取</a:t>
+            </a:r>
+          </a:p>
+        </p:txBody>
+      </p:sp>
+      <p:sp>
+        <p:nvSpPr>
+          <p:cNvPr id="8" name="Rectangle 7">
+            <a:extLst>
+              <a:ext uri="{FF2B5EF4-FFF2-40B4-BE49-F238E27FC236}">
+                <a16:creationId xmlns:a16="http://schemas.microsoft.com/office/drawing/2014/main" id="{615EE2FD-0EBF-204D-7244-F70DD87C3432}"/>
+              </a:ext>
+            </a:extLst>
+          </p:cNvPr>
+          <p:cNvSpPr/>
+          <p:nvPr/>
+        </p:nvSpPr>
+        <p:spPr>
+          <a:xfrm>
+            <a:off x="3580310" y="5741670"/>
+            <a:ext cx="2336620" cy="708660"/>
+          </a:xfrm>
+          <a:prstGeom prst="rect">
+            <a:avLst/>
+          </a:prstGeom>
+          <a:solidFill>
+            <a:schemeClr val="tx1"/>
+          </a:solidFill>
+          <a:ln w="28575">
+            <a:solidFill>
+              <a:schemeClr val="bg2"/>
+            </a:solidFill>
+          </a:ln>
+        </p:spPr>
+        <p:txBody>
+          <a:bodyPr wrap="square" lIns="0" rtlCol="0" anchor="ctr">
+            <a:noAutofit/>
+          </a:bodyPr>
+          <a:lstStyle/>
+          <a:p>
+            <a:r>
+              <a:rPr lang="en-CN" sz="1800" b="1" dirty="0">
+                <a:solidFill>
+                  <a:schemeClr val="accent2"/>
+                </a:solidFill>
+                <a:latin typeface="微软雅黑" pitchFamily="34" charset="-122"/>
+                <a:ea typeface="微软雅黑" pitchFamily="34" charset="-122"/>
+              </a:rPr>
+              <a:t>湖泊水位季节性或年际分析</a:t>
+            </a:r>
+          </a:p>
+        </p:txBody>
+      </p:sp>
+      <p:sp>
+        <p:nvSpPr>
+          <p:cNvPr id="9" name="Rectangle 8">
+            <a:extLst>
+              <a:ext uri="{FF2B5EF4-FFF2-40B4-BE49-F238E27FC236}">
+                <a16:creationId xmlns:a16="http://schemas.microsoft.com/office/drawing/2014/main" id="{D9DAB549-A7A3-C117-BF61-BDCEAA05A7F3}"/>
+              </a:ext>
+            </a:extLst>
+          </p:cNvPr>
+          <p:cNvSpPr/>
+          <p:nvPr/>
+        </p:nvSpPr>
+        <p:spPr>
+          <a:xfrm>
+            <a:off x="6213020" y="5741670"/>
+            <a:ext cx="2336620" cy="708660"/>
+          </a:xfrm>
+          <a:prstGeom prst="rect">
+            <a:avLst/>
+          </a:prstGeom>
+          <a:solidFill>
+            <a:schemeClr val="tx1"/>
+          </a:solidFill>
+          <a:ln w="28575">
+            <a:solidFill>
+              <a:schemeClr val="bg2"/>
+            </a:solidFill>
+          </a:ln>
+        </p:spPr>
+        <p:txBody>
+          <a:bodyPr wrap="square" lIns="0" rtlCol="0" anchor="ctr">
+            <a:noAutofit/>
+          </a:bodyPr>
+          <a:lstStyle/>
+          <a:p>
+            <a:r>
+              <a:rPr lang="en-CN" sz="1800" b="1" dirty="0">
+                <a:solidFill>
+                  <a:schemeClr val="accent2"/>
+                </a:solidFill>
+                <a:latin typeface="微软雅黑" pitchFamily="34" charset="-122"/>
+                <a:ea typeface="微软雅黑" pitchFamily="34" charset="-122"/>
+              </a:rPr>
+              <a:t>湖泊水位变化原因分析</a:t>
+            </a:r>
+          </a:p>
+        </p:txBody>
+      </p:sp>
+      <p:cxnSp>
+        <p:nvCxnSpPr>
+          <p:cNvPr id="11" name="Straight Arrow Connector 10">
+            <a:extLst>
+              <a:ext uri="{FF2B5EF4-FFF2-40B4-BE49-F238E27FC236}">
+                <a16:creationId xmlns:a16="http://schemas.microsoft.com/office/drawing/2014/main" id="{FF7F2C7C-86DB-F1CD-C530-4C1EF180F507}"/>
+              </a:ext>
+            </a:extLst>
+          </p:cNvPr>
+          <p:cNvCxnSpPr>
+            <a:cxnSpLocks/>
+            <a:stCxn id="2" idx="3"/>
+            <a:endCxn id="5" idx="1"/>
+          </p:cNvCxnSpPr>
+          <p:nvPr/>
+        </p:nvCxnSpPr>
+        <p:spPr bwMode="auto">
+          <a:xfrm>
+            <a:off x="3284220" y="4754880"/>
+            <a:ext cx="296090" cy="0"/>
+          </a:xfrm>
+          <a:prstGeom prst="straightConnector1">
+            <a:avLst/>
+          </a:prstGeom>
+          <a:ln w="28575">
+            <a:headEnd type="none" w="med" len="med"/>
+            <a:tailEnd type="triangle"/>
+          </a:ln>
+        </p:spPr>
+        <p:style>
+          <a:lnRef idx="1">
+            <a:schemeClr val="dk1"/>
+          </a:lnRef>
+          <a:fillRef idx="0">
+            <a:schemeClr val="dk1"/>
+          </a:fillRef>
+          <a:effectRef idx="0">
+            <a:schemeClr val="dk1"/>
+          </a:effectRef>
+          <a:fontRef idx="minor">
+            <a:schemeClr val="tx1"/>
+          </a:fontRef>
+        </p:style>
+      </p:cxnSp>
+      <p:cxnSp>
+        <p:nvCxnSpPr>
+          <p:cNvPr id="12" name="Straight Arrow Connector 11">
+            <a:extLst>
+              <a:ext uri="{FF2B5EF4-FFF2-40B4-BE49-F238E27FC236}">
+                <a16:creationId xmlns:a16="http://schemas.microsoft.com/office/drawing/2014/main" id="{C78D141F-6053-5157-3DEA-28A141CEBAFF}"/>
+              </a:ext>
+            </a:extLst>
+          </p:cNvPr>
+          <p:cNvCxnSpPr>
+            <a:cxnSpLocks/>
+            <a:stCxn id="5" idx="3"/>
+            <a:endCxn id="6" idx="1"/>
+          </p:cNvCxnSpPr>
+          <p:nvPr/>
+        </p:nvCxnSpPr>
+        <p:spPr bwMode="auto">
+          <a:xfrm>
+            <a:off x="5916930" y="4754880"/>
+            <a:ext cx="296090" cy="0"/>
+          </a:xfrm>
+          <a:prstGeom prst="straightConnector1">
+            <a:avLst/>
+          </a:prstGeom>
+          <a:ln w="28575">
+            <a:headEnd type="none" w="med" len="med"/>
+            <a:tailEnd type="triangle"/>
+          </a:ln>
+        </p:spPr>
+        <p:style>
+          <a:lnRef idx="1">
+            <a:schemeClr val="dk1"/>
+          </a:lnRef>
+          <a:fillRef idx="0">
+            <a:schemeClr val="dk1"/>
+          </a:fillRef>
+          <a:effectRef idx="0">
+            <a:schemeClr val="dk1"/>
+          </a:effectRef>
+          <a:fontRef idx="minor">
+            <a:schemeClr val="tx1"/>
+          </a:fontRef>
+        </p:style>
+      </p:cxnSp>
+      <p:cxnSp>
+        <p:nvCxnSpPr>
+          <p:cNvPr id="19" name="Elbow Connector 18">
+            <a:extLst>
+              <a:ext uri="{FF2B5EF4-FFF2-40B4-BE49-F238E27FC236}">
+                <a16:creationId xmlns:a16="http://schemas.microsoft.com/office/drawing/2014/main" id="{26F04A10-9794-34F7-A447-0B16BAA097E6}"/>
+              </a:ext>
+            </a:extLst>
+          </p:cNvPr>
+          <p:cNvCxnSpPr>
+            <a:stCxn id="6" idx="2"/>
+            <a:endCxn id="7" idx="0"/>
+          </p:cNvCxnSpPr>
+          <p:nvPr/>
+        </p:nvCxnSpPr>
+        <p:spPr bwMode="auto">
+          <a:xfrm rot="5400000">
+            <a:off x="4432390" y="2792730"/>
+            <a:ext cx="632460" cy="5265420"/>
+          </a:xfrm>
+          <a:prstGeom prst="bentConnector3">
+            <a:avLst/>
+          </a:prstGeom>
+          <a:ln w="28575">
+            <a:headEnd type="none" w="med" len="med"/>
+            <a:tailEnd type="triangle"/>
+          </a:ln>
+        </p:spPr>
+        <p:style>
+          <a:lnRef idx="1">
+            <a:schemeClr val="dk1"/>
+          </a:lnRef>
+          <a:fillRef idx="0">
+            <a:schemeClr val="dk1"/>
+          </a:fillRef>
+          <a:effectRef idx="0">
+            <a:schemeClr val="dk1"/>
+          </a:effectRef>
+          <a:fontRef idx="minor">
+            <a:schemeClr val="tx1"/>
+          </a:fontRef>
+        </p:style>
+      </p:cxnSp>
+      <p:cxnSp>
+        <p:nvCxnSpPr>
+          <p:cNvPr id="20" name="Straight Arrow Connector 19">
+            <a:extLst>
+              <a:ext uri="{FF2B5EF4-FFF2-40B4-BE49-F238E27FC236}">
+                <a16:creationId xmlns:a16="http://schemas.microsoft.com/office/drawing/2014/main" id="{9849D274-E2AA-C8BB-4A53-EE0209EF333B}"/>
+              </a:ext>
+            </a:extLst>
+          </p:cNvPr>
+          <p:cNvCxnSpPr>
+            <a:cxnSpLocks/>
+            <a:stCxn id="7" idx="3"/>
+            <a:endCxn id="8" idx="1"/>
+          </p:cNvCxnSpPr>
+          <p:nvPr/>
+        </p:nvCxnSpPr>
+        <p:spPr bwMode="auto">
+          <a:xfrm>
+            <a:off x="3284220" y="6096000"/>
+            <a:ext cx="296090" cy="0"/>
+          </a:xfrm>
+          <a:prstGeom prst="straightConnector1">
+            <a:avLst/>
+          </a:prstGeom>
+          <a:ln w="28575">
+            <a:headEnd type="none" w="med" len="med"/>
+            <a:tailEnd type="triangle"/>
+          </a:ln>
+        </p:spPr>
+        <p:style>
+          <a:lnRef idx="1">
+            <a:schemeClr val="dk1"/>
+          </a:lnRef>
+          <a:fillRef idx="0">
+            <a:schemeClr val="dk1"/>
+          </a:fillRef>
+          <a:effectRef idx="0">
+            <a:schemeClr val="dk1"/>
+          </a:effectRef>
+          <a:fontRef idx="minor">
+            <a:schemeClr val="tx1"/>
+          </a:fontRef>
+        </p:style>
+      </p:cxnSp>
+      <p:cxnSp>
+        <p:nvCxnSpPr>
+          <p:cNvPr id="25" name="Straight Arrow Connector 24">
+            <a:extLst>
+              <a:ext uri="{FF2B5EF4-FFF2-40B4-BE49-F238E27FC236}">
+                <a16:creationId xmlns:a16="http://schemas.microsoft.com/office/drawing/2014/main" id="{559C1EBE-2DE3-B3F5-5092-6CC1FA8D83C0}"/>
+              </a:ext>
+            </a:extLst>
+          </p:cNvPr>
+          <p:cNvCxnSpPr>
+            <a:cxnSpLocks/>
+            <a:stCxn id="8" idx="3"/>
+            <a:endCxn id="9" idx="1"/>
+          </p:cNvCxnSpPr>
+          <p:nvPr/>
+        </p:nvCxnSpPr>
+        <p:spPr bwMode="auto">
+          <a:xfrm>
+            <a:off x="5916930" y="6096000"/>
+            <a:ext cx="296090" cy="0"/>
+          </a:xfrm>
+          <a:prstGeom prst="straightConnector1">
+            <a:avLst/>
+          </a:prstGeom>
+          <a:ln w="28575">
+            <a:headEnd type="none" w="med" len="med"/>
+            <a:tailEnd type="triangle"/>
+          </a:ln>
+        </p:spPr>
+        <p:style>
+          <a:lnRef idx="1">
+            <a:schemeClr val="dk1"/>
+          </a:lnRef>
+          <a:fillRef idx="0">
+            <a:schemeClr val="dk1"/>
+          </a:fillRef>
+          <a:effectRef idx="0">
+            <a:schemeClr val="dk1"/>
+          </a:effectRef>
+          <a:fontRef idx="minor">
+            <a:schemeClr val="tx1"/>
+          </a:fontRef>
+        </p:style>
+      </p:cxnSp>
+    </p:spTree>
+    <p:extLst>
+      <p:ext uri="{BB962C8B-B14F-4D97-AF65-F5344CB8AC3E}">
+        <p14:creationId xmlns:p14="http://schemas.microsoft.com/office/powerpoint/2010/main" val="3657502759"/>
       </p:ext>
     </p:extLst>
   </p:cSld>
